--- a/seminar.pptx
+++ b/seminar.pptx
@@ -108,6 +108,11 @@
       </a:defRPr>
     </a:lvl9pPr>
   </p:defaultTextStyle>
+  <p:extLst>
+    <p:ext uri="{EFAFB233-063F-42B5-8137-9DF3F51BA10A}">
+      <p15:sldGuideLst xmlns:p15="http://schemas.microsoft.com/office/powerpoint/2012/main"/>
+    </p:ext>
+  </p:extLst>
 </p:presentation>
 </file>
 
@@ -7628,25 +7633,25 @@
           <p:nvPr>
             <p:extLst>
               <p:ext uri="{D42A27DB-BD31-4B8C-83A1-F6EECF244321}">
-                <p14:modId xmlns:p14="http://schemas.microsoft.com/office/powerpoint/2010/main" val="1597624560"/>
+                <p14:modId xmlns:p14="http://schemas.microsoft.com/office/powerpoint/2010/main" val="1818434298"/>
               </p:ext>
             </p:extLst>
           </p:nvPr>
         </p:nvGraphicFramePr>
         <p:xfrm>
-          <a:off x="6553552" y="1698119"/>
-          <a:ext cx="4391816" cy="2279522"/>
+          <a:off x="6553200" y="1698625"/>
+          <a:ext cx="4392613" cy="2505075"/>
         </p:xfrm>
         <a:graphic>
           <a:graphicData uri="http://schemas.openxmlformats.org/presentationml/2006/ole">
             <mc:AlternateContent xmlns:mc="http://schemas.openxmlformats.org/markup-compatibility/2006">
               <mc:Choice xmlns:v="urn:schemas-microsoft-com:vml" Requires="v">
-                <p:oleObj name="Worksheet" r:id="rId2" imgW="4419658" imgH="1933678" progId="Excel.Sheet.12">
+                <p:oleObj name="Worksheet" r:id="rId2" imgW="4419658" imgH="2124126" progId="Excel.Sheet.12">
                   <p:embed/>
                 </p:oleObj>
               </mc:Choice>
               <mc:Fallback>
-                <p:oleObj name="Worksheet" r:id="rId2" imgW="4419658" imgH="1933678" progId="Excel.Sheet.12">
+                <p:oleObj name="Worksheet" r:id="rId2" imgW="4419658" imgH="2124126" progId="Excel.Sheet.12">
                   <p:embed/>
                   <p:pic>
                     <p:nvPicPr>
@@ -7662,8 +7667,8 @@
                     </p:blipFill>
                     <p:spPr>
                       <a:xfrm>
-                        <a:off x="6553552" y="1698119"/>
-                        <a:ext cx="4391816" cy="2279522"/>
+                        <a:off x="6553200" y="1698625"/>
+                        <a:ext cx="4392613" cy="2505075"/>
                       </a:xfrm>
                       <a:prstGeom prst="rect">
                         <a:avLst/>

--- a/seminar.pptx
+++ b/seminar.pptx
@@ -263,7 +263,7 @@
           <a:p>
             <a:fld id="{991C47A4-CF2E-4814-8EF5-9F19129A64E7}" type="datetimeFigureOut">
               <a:rPr lang="en-US" smtClean="0"/>
-              <a:t>7/20/2026</a:t>
+              <a:t>7/21/2026</a:t>
             </a:fld>
             <a:endParaRPr lang="en-US"/>
           </a:p>
@@ -461,7 +461,7 @@
           <a:p>
             <a:fld id="{991C47A4-CF2E-4814-8EF5-9F19129A64E7}" type="datetimeFigureOut">
               <a:rPr lang="en-US" smtClean="0"/>
-              <a:t>7/20/2026</a:t>
+              <a:t>7/21/2026</a:t>
             </a:fld>
             <a:endParaRPr lang="en-US"/>
           </a:p>
@@ -669,7 +669,7 @@
           <a:p>
             <a:fld id="{991C47A4-CF2E-4814-8EF5-9F19129A64E7}" type="datetimeFigureOut">
               <a:rPr lang="en-US" smtClean="0"/>
-              <a:t>7/20/2026</a:t>
+              <a:t>7/21/2026</a:t>
             </a:fld>
             <a:endParaRPr lang="en-US"/>
           </a:p>
@@ -867,7 +867,7 @@
           <a:p>
             <a:fld id="{991C47A4-CF2E-4814-8EF5-9F19129A64E7}" type="datetimeFigureOut">
               <a:rPr lang="en-US" smtClean="0"/>
-              <a:t>7/20/2026</a:t>
+              <a:t>7/21/2026</a:t>
             </a:fld>
             <a:endParaRPr lang="en-US"/>
           </a:p>
@@ -1142,7 +1142,7 @@
           <a:p>
             <a:fld id="{991C47A4-CF2E-4814-8EF5-9F19129A64E7}" type="datetimeFigureOut">
               <a:rPr lang="en-US" smtClean="0"/>
-              <a:t>7/20/2026</a:t>
+              <a:t>7/21/2026</a:t>
             </a:fld>
             <a:endParaRPr lang="en-US"/>
           </a:p>
@@ -1407,7 +1407,7 @@
           <a:p>
             <a:fld id="{991C47A4-CF2E-4814-8EF5-9F19129A64E7}" type="datetimeFigureOut">
               <a:rPr lang="en-US" smtClean="0"/>
-              <a:t>7/20/2026</a:t>
+              <a:t>7/21/2026</a:t>
             </a:fld>
             <a:endParaRPr lang="en-US"/>
           </a:p>
@@ -1819,7 +1819,7 @@
           <a:p>
             <a:fld id="{991C47A4-CF2E-4814-8EF5-9F19129A64E7}" type="datetimeFigureOut">
               <a:rPr lang="en-US" smtClean="0"/>
-              <a:t>7/20/2026</a:t>
+              <a:t>7/21/2026</a:t>
             </a:fld>
             <a:endParaRPr lang="en-US"/>
           </a:p>
@@ -1960,7 +1960,7 @@
           <a:p>
             <a:fld id="{991C47A4-CF2E-4814-8EF5-9F19129A64E7}" type="datetimeFigureOut">
               <a:rPr lang="en-US" smtClean="0"/>
-              <a:t>7/20/2026</a:t>
+              <a:t>7/21/2026</a:t>
             </a:fld>
             <a:endParaRPr lang="en-US"/>
           </a:p>
@@ -2073,7 +2073,7 @@
           <a:p>
             <a:fld id="{991C47A4-CF2E-4814-8EF5-9F19129A64E7}" type="datetimeFigureOut">
               <a:rPr lang="en-US" smtClean="0"/>
-              <a:t>7/20/2026</a:t>
+              <a:t>7/21/2026</a:t>
             </a:fld>
             <a:endParaRPr lang="en-US"/>
           </a:p>
@@ -2384,7 +2384,7 @@
           <a:p>
             <a:fld id="{991C47A4-CF2E-4814-8EF5-9F19129A64E7}" type="datetimeFigureOut">
               <a:rPr lang="en-US" smtClean="0"/>
-              <a:t>7/20/2026</a:t>
+              <a:t>7/21/2026</a:t>
             </a:fld>
             <a:endParaRPr lang="en-US"/>
           </a:p>
@@ -2672,7 +2672,7 @@
           <a:p>
             <a:fld id="{991C47A4-CF2E-4814-8EF5-9F19129A64E7}" type="datetimeFigureOut">
               <a:rPr lang="en-US" smtClean="0"/>
-              <a:t>7/20/2026</a:t>
+              <a:t>7/21/2026</a:t>
             </a:fld>
             <a:endParaRPr lang="en-US"/>
           </a:p>
@@ -2913,7 +2913,7 @@
           <a:p>
             <a:fld id="{991C47A4-CF2E-4814-8EF5-9F19129A64E7}" type="datetimeFigureOut">
               <a:rPr lang="en-US" smtClean="0"/>
-              <a:t>7/20/2026</a:t>
+              <a:t>7/21/2026</a:t>
             </a:fld>
             <a:endParaRPr lang="en-US"/>
           </a:p>
@@ -6898,7 +6898,23 @@
                   <a:schemeClr val="tx1"/>
                 </a:solidFill>
               </a:rPr>
-              <a:t>kiểmtra</a:t>
+              <a:t>kiểm</a:t>
+            </a:r>
+            <a:r>
+              <a:rPr lang="en-US" sz="1600" dirty="0">
+                <a:solidFill>
+                  <a:schemeClr val="tx1"/>
+                </a:solidFill>
+              </a:rPr>
+              <a:t> </a:t>
+            </a:r>
+            <a:r>
+              <a:rPr lang="en-US" sz="1600" dirty="0" err="1">
+                <a:solidFill>
+                  <a:schemeClr val="tx1"/>
+                </a:solidFill>
+              </a:rPr>
+              <a:t>tra</a:t>
             </a:r>
             <a:r>
               <a:rPr lang="en-US" sz="1600" dirty="0">
